--- a/public/fun/cards/expert/명함_프리랜서전문가_09_와인모브.pptx
+++ b/public/fun/cards/expert/명함_프리랜서전문가_09_와인모브.pptx
@@ -3501,7 +3501,7 @@
         <p:spPr>
           <a:xfrm>
             <a:off x="252000" y="388800"/>
-            <a:ext cx="576000" cy="324000"/>
+            <a:ext cx="576000" cy="129600"/>
           </a:xfrm>
           <a:prstGeom prst="rect">
             <a:avLst/>
@@ -3516,11 +3516,11 @@
           <a:p>
             <a:pPr algn="l">
               <a:lnSpc>
-                <a:spcPts val="2610"/>
+                <a:spcPts val="927"/>
               </a:lnSpc>
             </a:pPr>
             <a:r>
-              <a:rPr sz="1800" b="1">
+              <a:rPr sz="640" b="1" spc="120">
                 <a:solidFill>
                   <a:srgbClr val="BC9237"/>
                 </a:solidFill>
@@ -3534,13 +3534,42 @@
       </p:sp>
       <p:sp>
         <p:nvSpPr>
-          <p:cNvPr id="4" name="텍스트"/>
+          <p:cNvPr id="4" name="Rectangle 3"/>
+          <p:cNvSpPr/>
+          <p:nvPr/>
+        </p:nvSpPr>
+        <p:spPr>
+          <a:xfrm>
+            <a:off x="252000" y="554400"/>
+            <a:ext cx="144000" cy="14400"/>
+          </a:xfrm>
+          <a:prstGeom prst="rect">
+            <a:avLst/>
+          </a:prstGeom>
+          <a:solidFill>
+            <a:srgbClr val="BC9237"/>
+          </a:solidFill>
+          <a:ln>
+            <a:noFill/>
+          </a:ln>
+        </p:spPr>
+        <p:txBody>
+          <a:bodyPr rtlCol="0" anchor="ctr"/>
+          <a:lstStyle/>
+          <a:p>
+            <a:pPr algn="ctr"/>
+          </a:p>
+        </p:txBody>
+      </p:sp>
+      <p:sp>
+        <p:nvSpPr>
+          <p:cNvPr id="5" name="텍스트"/>
           <p:cNvSpPr txBox="1"/>
           <p:nvPr/>
         </p:nvSpPr>
         <p:spPr>
           <a:xfrm>
-            <a:off x="252000" y="712800"/>
+            <a:off x="252000" y="626400"/>
             <a:ext cx="1296000" cy="180000"/>
           </a:xfrm>
           <a:prstGeom prst="rect">
@@ -3556,11 +3585,11 @@
           <a:p>
             <a:pPr algn="l">
               <a:lnSpc>
-                <a:spcPts val="1015"/>
+                <a:spcPts val="1073"/>
               </a:lnSpc>
             </a:pPr>
             <a:r>
-              <a:rPr sz="700" b="1">
+              <a:rPr sz="740" b="1">
                 <a:solidFill>
                   <a:srgbClr val="1B2230"/>
                 </a:solidFill>
@@ -3574,14 +3603,14 @@
       </p:sp>
       <p:sp>
         <p:nvSpPr>
-          <p:cNvPr id="5" name="텍스트"/>
+          <p:cNvPr id="6" name="텍스트"/>
           <p:cNvSpPr txBox="1"/>
           <p:nvPr/>
         </p:nvSpPr>
         <p:spPr>
           <a:xfrm>
             <a:off x="1656000" y="388800"/>
-            <a:ext cx="576000" cy="324000"/>
+            <a:ext cx="576000" cy="129600"/>
           </a:xfrm>
           <a:prstGeom prst="rect">
             <a:avLst/>
@@ -3596,11 +3625,11 @@
           <a:p>
             <a:pPr algn="l">
               <a:lnSpc>
-                <a:spcPts val="2610"/>
+                <a:spcPts val="927"/>
               </a:lnSpc>
             </a:pPr>
             <a:r>
-              <a:rPr sz="1800" b="1">
+              <a:rPr sz="640" b="1" spc="120">
                 <a:solidFill>
                   <a:srgbClr val="8E4A63"/>
                 </a:solidFill>
@@ -3614,13 +3643,42 @@
       </p:sp>
       <p:sp>
         <p:nvSpPr>
-          <p:cNvPr id="6" name="텍스트"/>
+          <p:cNvPr id="7" name="Rectangle 6"/>
+          <p:cNvSpPr/>
+          <p:nvPr/>
+        </p:nvSpPr>
+        <p:spPr>
+          <a:xfrm>
+            <a:off x="1656000" y="554400"/>
+            <a:ext cx="144000" cy="14400"/>
+          </a:xfrm>
+          <a:prstGeom prst="rect">
+            <a:avLst/>
+          </a:prstGeom>
+          <a:solidFill>
+            <a:srgbClr val="8E4A63"/>
+          </a:solidFill>
+          <a:ln>
+            <a:noFill/>
+          </a:ln>
+        </p:spPr>
+        <p:txBody>
+          <a:bodyPr rtlCol="0" anchor="ctr"/>
+          <a:lstStyle/>
+          <a:p>
+            <a:pPr algn="ctr"/>
+          </a:p>
+        </p:txBody>
+      </p:sp>
+      <p:sp>
+        <p:nvSpPr>
+          <p:cNvPr id="8" name="텍스트"/>
           <p:cNvSpPr txBox="1"/>
           <p:nvPr/>
         </p:nvSpPr>
         <p:spPr>
           <a:xfrm>
-            <a:off x="1656000" y="712800"/>
+            <a:off x="1656000" y="626400"/>
             <a:ext cx="1296000" cy="180000"/>
           </a:xfrm>
           <a:prstGeom prst="rect">
@@ -3636,11 +3694,11 @@
           <a:p>
             <a:pPr algn="l">
               <a:lnSpc>
-                <a:spcPts val="1015"/>
+                <a:spcPts val="1073"/>
               </a:lnSpc>
             </a:pPr>
             <a:r>
-              <a:rPr sz="700" b="1">
+              <a:rPr sz="740" b="1">
                 <a:solidFill>
                   <a:srgbClr val="1B2230"/>
                 </a:solidFill>
@@ -3654,14 +3712,14 @@
       </p:sp>
       <p:sp>
         <p:nvSpPr>
-          <p:cNvPr id="7" name="텍스트"/>
+          <p:cNvPr id="9" name="텍스트"/>
           <p:cNvSpPr txBox="1"/>
           <p:nvPr/>
         </p:nvSpPr>
         <p:spPr>
           <a:xfrm>
             <a:off x="252000" y="928800"/>
-            <a:ext cx="576000" cy="324000"/>
+            <a:ext cx="576000" cy="129600"/>
           </a:xfrm>
           <a:prstGeom prst="rect">
             <a:avLst/>
@@ -3676,11 +3734,11 @@
           <a:p>
             <a:pPr algn="l">
               <a:lnSpc>
-                <a:spcPts val="2610"/>
+                <a:spcPts val="927"/>
               </a:lnSpc>
             </a:pPr>
             <a:r>
-              <a:rPr sz="1800" b="1">
+              <a:rPr sz="640" b="1" spc="120">
                 <a:solidFill>
                   <a:srgbClr val="8E4A63"/>
                 </a:solidFill>
@@ -3694,13 +3752,42 @@
       </p:sp>
       <p:sp>
         <p:nvSpPr>
-          <p:cNvPr id="8" name="텍스트"/>
+          <p:cNvPr id="10" name="Rectangle 9"/>
+          <p:cNvSpPr/>
+          <p:nvPr/>
+        </p:nvSpPr>
+        <p:spPr>
+          <a:xfrm>
+            <a:off x="252000" y="1094400"/>
+            <a:ext cx="144000" cy="14400"/>
+          </a:xfrm>
+          <a:prstGeom prst="rect">
+            <a:avLst/>
+          </a:prstGeom>
+          <a:solidFill>
+            <a:srgbClr val="8E4A63"/>
+          </a:solidFill>
+          <a:ln>
+            <a:noFill/>
+          </a:ln>
+        </p:spPr>
+        <p:txBody>
+          <a:bodyPr rtlCol="0" anchor="ctr"/>
+          <a:lstStyle/>
+          <a:p>
+            <a:pPr algn="ctr"/>
+          </a:p>
+        </p:txBody>
+      </p:sp>
+      <p:sp>
+        <p:nvSpPr>
+          <p:cNvPr id="11" name="텍스트"/>
           <p:cNvSpPr txBox="1"/>
           <p:nvPr/>
         </p:nvSpPr>
         <p:spPr>
           <a:xfrm>
-            <a:off x="252000" y="1252800"/>
+            <a:off x="252000" y="1166400"/>
             <a:ext cx="1296000" cy="180000"/>
           </a:xfrm>
           <a:prstGeom prst="rect">
@@ -3716,11 +3803,11 @@
           <a:p>
             <a:pPr algn="l">
               <a:lnSpc>
-                <a:spcPts val="1015"/>
+                <a:spcPts val="1073"/>
               </a:lnSpc>
             </a:pPr>
             <a:r>
-              <a:rPr sz="700" b="1">
+              <a:rPr sz="740" b="1">
                 <a:solidFill>
                   <a:srgbClr val="1B2230"/>
                 </a:solidFill>
@@ -3734,14 +3821,14 @@
       </p:sp>
       <p:sp>
         <p:nvSpPr>
-          <p:cNvPr id="9" name="텍스트"/>
+          <p:cNvPr id="12" name="텍스트"/>
           <p:cNvSpPr txBox="1"/>
           <p:nvPr/>
         </p:nvSpPr>
         <p:spPr>
           <a:xfrm>
             <a:off x="1656000" y="928800"/>
-            <a:ext cx="576000" cy="324000"/>
+            <a:ext cx="576000" cy="129600"/>
           </a:xfrm>
           <a:prstGeom prst="rect">
             <a:avLst/>
@@ -3756,11 +3843,11 @@
           <a:p>
             <a:pPr algn="l">
               <a:lnSpc>
-                <a:spcPts val="2610"/>
+                <a:spcPts val="927"/>
               </a:lnSpc>
             </a:pPr>
             <a:r>
-              <a:rPr sz="1800" b="1">
+              <a:rPr sz="640" b="1" spc="120">
                 <a:solidFill>
                   <a:srgbClr val="BC9237"/>
                 </a:solidFill>
@@ -3774,13 +3861,42 @@
       </p:sp>
       <p:sp>
         <p:nvSpPr>
-          <p:cNvPr id="10" name="텍스트"/>
+          <p:cNvPr id="13" name="Rectangle 12"/>
+          <p:cNvSpPr/>
+          <p:nvPr/>
+        </p:nvSpPr>
+        <p:spPr>
+          <a:xfrm>
+            <a:off x="1656000" y="1094400"/>
+            <a:ext cx="144000" cy="14400"/>
+          </a:xfrm>
+          <a:prstGeom prst="rect">
+            <a:avLst/>
+          </a:prstGeom>
+          <a:solidFill>
+            <a:srgbClr val="BC9237"/>
+          </a:solidFill>
+          <a:ln>
+            <a:noFill/>
+          </a:ln>
+        </p:spPr>
+        <p:txBody>
+          <a:bodyPr rtlCol="0" anchor="ctr"/>
+          <a:lstStyle/>
+          <a:p>
+            <a:pPr algn="ctr"/>
+          </a:p>
+        </p:txBody>
+      </p:sp>
+      <p:sp>
+        <p:nvSpPr>
+          <p:cNvPr id="14" name="텍스트"/>
           <p:cNvSpPr txBox="1"/>
           <p:nvPr/>
         </p:nvSpPr>
         <p:spPr>
           <a:xfrm>
-            <a:off x="1656000" y="1252800"/>
+            <a:off x="1656000" y="1166400"/>
             <a:ext cx="1296000" cy="180000"/>
           </a:xfrm>
           <a:prstGeom prst="rect">
@@ -3796,11 +3912,11 @@
           <a:p>
             <a:pPr algn="l">
               <a:lnSpc>
-                <a:spcPts val="1015"/>
+                <a:spcPts val="1073"/>
               </a:lnSpc>
             </a:pPr>
             <a:r>
-              <a:rPr sz="700" b="1">
+              <a:rPr sz="740" b="1">
                 <a:solidFill>
                   <a:srgbClr val="1B2230"/>
                 </a:solidFill>
@@ -3814,7 +3930,7 @@
       </p:sp>
       <p:sp>
         <p:nvSpPr>
-          <p:cNvPr id="11" name="텍스트"/>
+          <p:cNvPr id="15" name="텍스트"/>
           <p:cNvSpPr txBox="1"/>
           <p:nvPr/>
         </p:nvSpPr>
